--- a/docs/Crypto_Market_Analysis_Final_Evaluation.pptx
+++ b/docs/Crypto_Market_Analysis_Final_Evaluation.pptx
@@ -761,6 +761,385 @@
 </file>
 
 <file path=ppt/charts/chart3.xml><?xml version="1.0" encoding="utf-8"?>
+<c:chartSpace xmlns:c="http://schemas.openxmlformats.org/drawingml/2006/chart" xmlns:a="http://schemas.openxmlformats.org/drawingml/2006/main" xmlns:r="http://schemas.openxmlformats.org/officeDocument/2006/relationships">
+  <c:date1904 val="0"/>
+  <c:roundedCorners val="1"/>
+  <c:chart>
+    <c:autoTitleDeleted val="1"/>
+    <c:plotArea>
+      <c:layout/>
+      <c:barChart>
+        <c:barDir val="col"/>
+        <c:grouping val="clustered"/>
+        <c:varyColors val="0"/>
+        <c:ser>
+          <c:idx val="0"/>
+          <c:order val="0"/>
+          <c:tx>
+            <c:strRef>
+              <c:f>Sheet1!$B$1</c:f>
+              <c:strCache>
+                <c:ptCount val="1"/>
+                <c:pt idx="0">
+                  <c:v>Calm  (225 days)</c:v>
+                </c:pt>
+              </c:strCache>
+            </c:strRef>
+          </c:tx>
+          <c:spPr>
+            <a:solidFill>
+              <a:srgbClr val="A8B8C0"/>
+            </a:solidFill>
+            <a:effectLst/>
+          </c:spPr>
+          <c:invertIfNegative val="0"/>
+          <c:dLbls>
+            <c:numFmt formatCode="0.00" sourceLinked="0"/>
+            <c:txPr>
+              <a:bodyPr/>
+              <a:lstStyle/>
+              <a:p>
+                <a:pPr>
+                  <a:defRPr b="0" i="0" strike="noStrike" sz="950" u="none">
+                    <a:solidFill>
+                      <a:srgbClr val="16202A"/>
+                    </a:solidFill>
+                    <a:latin typeface="Arial"/>
+                  </a:defRPr>
+                </a:pPr>
+              </a:p>
+            </c:txPr>
+            <c:showLegendKey val="0"/>
+            <c:showVal val="1"/>
+            <c:showCatName val="0"/>
+            <c:showSerName val="0"/>
+            <c:showPercent val="0"/>
+            <c:showBubbleSize val="0"/>
+            <c:showLeaderLines val="0"/>
+          </c:dLbls>
+          <c:cat>
+            <c:multiLvlStrRef>
+              <c:f>Sheet1!$A$2:$A$7</c:f>
+              <c:multiLvlStrCache>
+                <c:ptCount val="6"/>
+                <c:lvl>
+                  <c:pt idx="0">
+                    <c:v>BTC</c:v>
+                  </c:pt>
+                  <c:pt idx="1">
+                    <c:v>ETH</c:v>
+                  </c:pt>
+                  <c:pt idx="2">
+                    <c:v>SOL</c:v>
+                  </c:pt>
+                  <c:pt idx="3">
+                    <c:v>BNB</c:v>
+                  </c:pt>
+                  <c:pt idx="4">
+                    <c:v>XRP</c:v>
+                  </c:pt>
+                  <c:pt idx="5">
+                    <c:v>ADA</c:v>
+                  </c:pt>
+                </c:lvl>
+              </c:multiLvlStrCache>
+            </c:multiLvlStrRef>
+          </c:cat>
+          <c:val>
+            <c:numRef>
+              <c:f>Sheet1!$B$2:$B$7</c:f>
+              <c:numCache>
+                <c:formatCode>General</c:formatCode>
+                <c:ptCount val="6"/>
+                <c:pt idx="0">
+                  <c:v>0</c:v>
+                </c:pt>
+                <c:pt idx="1">
+                  <c:v>-0.01</c:v>
+                </c:pt>
+                <c:pt idx="2">
+                  <c:v>0.03</c:v>
+                </c:pt>
+                <c:pt idx="3">
+                  <c:v>-0.01</c:v>
+                </c:pt>
+                <c:pt idx="4">
+                  <c:v>0.03</c:v>
+                </c:pt>
+                <c:pt idx="5">
+                  <c:v>0.1</c:v>
+                </c:pt>
+              </c:numCache>
+            </c:numRef>
+          </c:val>
+        </c:ser>
+        <c:ser>
+          <c:idx val="1"/>
+          <c:order val="1"/>
+          <c:tx>
+            <c:strRef>
+              <c:f>Sheet1!$C$1</c:f>
+              <c:strCache>
+                <c:ptCount val="1"/>
+                <c:pt idx="0">
+                  <c:v>Stressed  (25 days)</c:v>
+                </c:pt>
+              </c:strCache>
+            </c:strRef>
+          </c:tx>
+          <c:spPr>
+            <a:solidFill>
+              <a:srgbClr val="E85D5D"/>
+            </a:solidFill>
+            <a:effectLst/>
+          </c:spPr>
+          <c:invertIfNegative val="0"/>
+          <c:dLbls>
+            <c:numFmt formatCode="0.00" sourceLinked="0"/>
+            <c:txPr>
+              <a:bodyPr/>
+              <a:lstStyle/>
+              <a:p>
+                <a:pPr>
+                  <a:defRPr b="0" i="0" strike="noStrike" sz="950" u="none">
+                    <a:solidFill>
+                      <a:srgbClr val="16202A"/>
+                    </a:solidFill>
+                    <a:latin typeface="Arial"/>
+                  </a:defRPr>
+                </a:pPr>
+              </a:p>
+            </c:txPr>
+            <c:showLegendKey val="0"/>
+            <c:showVal val="1"/>
+            <c:showCatName val="0"/>
+            <c:showSerName val="0"/>
+            <c:showPercent val="0"/>
+            <c:showBubbleSize val="0"/>
+            <c:showLeaderLines val="0"/>
+          </c:dLbls>
+          <c:cat>
+            <c:multiLvlStrRef>
+              <c:f>Sheet1!$A$2:$A$7</c:f>
+              <c:multiLvlStrCache>
+                <c:ptCount val="6"/>
+                <c:lvl>
+                  <c:pt idx="0">
+                    <c:v>BTC</c:v>
+                  </c:pt>
+                  <c:pt idx="1">
+                    <c:v>ETH</c:v>
+                  </c:pt>
+                  <c:pt idx="2">
+                    <c:v>SOL</c:v>
+                  </c:pt>
+                  <c:pt idx="3">
+                    <c:v>BNB</c:v>
+                  </c:pt>
+                  <c:pt idx="4">
+                    <c:v>XRP</c:v>
+                  </c:pt>
+                  <c:pt idx="5">
+                    <c:v>ADA</c:v>
+                  </c:pt>
+                </c:lvl>
+              </c:multiLvlStrCache>
+            </c:multiLvlStrRef>
+          </c:cat>
+          <c:val>
+            <c:numRef>
+              <c:f>Sheet1!$C$2:$C$7</c:f>
+              <c:numCache>
+                <c:formatCode>General</c:formatCode>
+                <c:ptCount val="6"/>
+                <c:pt idx="0">
+                  <c:v>0.12</c:v>
+                </c:pt>
+                <c:pt idx="1">
+                  <c:v>0.17</c:v>
+                </c:pt>
+                <c:pt idx="2">
+                  <c:v>0.21</c:v>
+                </c:pt>
+                <c:pt idx="3">
+                  <c:v>0.09</c:v>
+                </c:pt>
+                <c:pt idx="4">
+                  <c:v>0.2</c:v>
+                </c:pt>
+                <c:pt idx="5">
+                  <c:v>0.32</c:v>
+                </c:pt>
+              </c:numCache>
+            </c:numRef>
+          </c:val>
+        </c:ser>
+        <c:dLbls>
+          <c:numFmt formatCode="0.00" sourceLinked="0"/>
+          <c:txPr>
+            <a:bodyPr/>
+            <a:lstStyle/>
+            <a:p>
+              <a:pPr>
+                <a:defRPr b="0" i="0" strike="noStrike" sz="950" u="none">
+                  <a:solidFill>
+                    <a:srgbClr val="16202A"/>
+                  </a:solidFill>
+                  <a:latin typeface="Arial"/>
+                </a:defRPr>
+              </a:pPr>
+            </a:p>
+          </c:txPr>
+          <c:showLegendKey val="0"/>
+          <c:showVal val="1"/>
+          <c:showCatName val="0"/>
+          <c:showSerName val="0"/>
+          <c:showPercent val="0"/>
+          <c:showBubbleSize val="0"/>
+          <c:showLeaderLines val="0"/>
+        </c:dLbls>
+        <c:gapWidth val="55"/>
+        <c:overlap val="0"/>
+        <c:axId val="2094734554"/>
+        <c:axId val="2094734552"/>
+        <c:axId val="2094734556"/>
+      </c:barChart>
+      <c:catAx>
+        <c:axId val="2094734554"/>
+        <c:scaling>
+          <c:orientation val="minMax"/>
+        </c:scaling>
+        <c:delete val="0"/>
+        <c:axPos val="b"/>
+        <c:numFmt formatCode="General" sourceLinked="1"/>
+        <c:majorTickMark val="out"/>
+        <c:minorTickMark val="none"/>
+        <c:tickLblPos val="low"/>
+        <c:spPr>
+          <a:ln w="12700" cap="flat">
+            <a:solidFill>
+              <a:srgbClr val="DCE4E6"/>
+            </a:solidFill>
+            <a:prstDash val="solid"/>
+            <a:round/>
+          </a:ln>
+        </c:spPr>
+        <c:txPr>
+          <a:bodyPr/>
+          <a:lstStyle/>
+          <a:p>
+            <a:pPr>
+              <a:defRPr sz="1150" b="1" i="0" u="none" strike="noStrike">
+                <a:solidFill>
+                  <a:srgbClr val="16202A"/>
+                </a:solidFill>
+                <a:latin typeface="Arial"/>
+              </a:defRPr>
+            </a:pPr>
+            <a:endParaRPr lang="en-US"/>
+          </a:p>
+        </c:txPr>
+        <c:crossAx val="2094734552"/>
+        <c:crosses val="autoZero"/>
+        <c:auto val="1"/>
+        <c:lblAlgn val="ctr"/>
+        <c:noMultiLvlLbl val="1"/>
+      </c:catAx>
+      <c:valAx>
+        <c:axId val="2094734552"/>
+        <c:scaling>
+          <c:orientation val="minMax"/>
+          <c:max val="0.38"/>
+          <c:min val="-0.06"/>
+        </c:scaling>
+        <c:delete val="0"/>
+        <c:axPos val="l"/>
+        <c:majorGridlines>
+          <c:spPr>
+            <a:ln w="9525" cap="flat">
+              <a:solidFill>
+                <a:srgbClr val="E8EDEF"/>
+              </a:solidFill>
+              <a:prstDash val="solid"/>
+              <a:round/>
+            </a:ln>
+          </c:spPr>
+        </c:majorGridlines>
+        <c:numFmt formatCode="0.0" sourceLinked="0"/>
+        <c:majorTickMark val="out"/>
+        <c:minorTickMark val="none"/>
+        <c:tickLblPos val="nextTo"/>
+        <c:spPr>
+          <a:ln w="12700" cap="flat">
+            <a:solidFill>
+              <a:srgbClr val="DCE4E6"/>
+            </a:solidFill>
+            <a:prstDash val="solid"/>
+            <a:round/>
+          </a:ln>
+        </c:spPr>
+        <c:txPr>
+          <a:bodyPr/>
+          <a:lstStyle/>
+          <a:p>
+            <a:pPr>
+              <a:defRPr sz="900" b="0" i="0" u="none" strike="noStrike">
+                <a:solidFill>
+                  <a:srgbClr val="5B6B76"/>
+                </a:solidFill>
+                <a:latin typeface="Arial"/>
+              </a:defRPr>
+            </a:pPr>
+            <a:endParaRPr lang="en-US"/>
+          </a:p>
+        </c:txPr>
+        <c:crossAx val="2094734554"/>
+        <c:crosses val="autoZero"/>
+        <c:crossBetween val="between"/>
+      </c:valAx>
+      <c:spPr>
+        <a:noFill/>
+        <a:ln>
+          <a:noFill/>
+        </a:ln>
+        <a:effectLst/>
+      </c:spPr>
+    </c:plotArea>
+    <c:legend>
+      <c:legendPos val="t"/>
+      <c:overlay val="0"/>
+      <c:txPr>
+        <a:bodyPr/>
+        <a:lstStyle/>
+        <a:p>
+          <a:pPr>
+            <a:defRPr sz="1050">
+              <a:solidFill>
+                <a:srgbClr val="5B6B76"/>
+              </a:solidFill>
+            </a:defRPr>
+          </a:pPr>
+          <a:endParaRPr lang="en-US"/>
+        </a:p>
+      </c:txPr>
+    </c:legend>
+    <c:plotVisOnly val="1"/>
+    <c:dispBlanksAs val="span"/>
+  </c:chart>
+  <c:spPr>
+    <a:noFill/>
+    <a:ln>
+      <a:noFill/>
+    </a:ln>
+    <a:effectLst/>
+  </c:spPr>
+  <c:externalData r:id="rId1">
+    <c:autoUpdate val="0"/>
+  </c:externalData>
+</c:chartSpace>
+</file>
+
+<file path=ppt/charts/chart4.xml><?xml version="1.0" encoding="utf-8"?>
 <c:chartSpace xmlns:c="http://schemas.openxmlformats.org/drawingml/2006/chart" xmlns:a="http://schemas.openxmlformats.org/drawingml/2006/main" xmlns:r="http://schemas.openxmlformats.org/officeDocument/2006/relationships">
   <c:date1904 val="0"/>
   <c:roundedCorners val="1"/>
@@ -12194,7 +12573,7 @@
                 <a:ea typeface="Calibri" pitchFamily="34" charset="-122"/>
                 <a:cs typeface="Calibri" pitchFamily="34" charset="-120"/>
               </a:rPr>
-              <a:t>Does crypto move with traditional markets, or on its own? The answer changes with the regime — so we measure it three ways.</a:t>
+              <a:t>Does crypto actually diversify a portfolio? A single number says yes. Splitting the sample says otherwise.</a:t>
             </a:r>
             <a:endParaRPr lang="en-US" sz="1300" dirty="0"/>
           </a:p>
@@ -12202,143 +12581,78 @@
       </p:sp>
       <p:sp>
         <p:nvSpPr>
-          <p:cNvPr id="5" name="Shape 3"/>
-          <p:cNvSpPr/>
-          <p:nvPr/>
-        </p:nvSpPr>
-        <p:spPr>
-          <a:xfrm>
-            <a:off x="548640" y="1691640"/>
-            <a:ext cx="10607040" cy="932688"/>
-          </a:xfrm>
-          <a:prstGeom prst="roundRect">
-            <a:avLst>
-              <a:gd name="adj" fmla="val 7843"/>
-            </a:avLst>
-          </a:prstGeom>
-          <a:solidFill>
-            <a:srgbClr val="F1F5F6"/>
-          </a:solidFill>
-          <a:ln/>
-        </p:spPr>
-      </p:sp>
-      <p:sp>
-        <p:nvSpPr>
-          <p:cNvPr id="6" name="Shape 4"/>
-          <p:cNvSpPr/>
-          <p:nvPr/>
-        </p:nvSpPr>
-        <p:spPr>
-          <a:xfrm>
-            <a:off x="777240" y="1865376"/>
-            <a:ext cx="585216" cy="585216"/>
-          </a:xfrm>
-          <a:prstGeom prst="ellipse">
-            <a:avLst/>
-          </a:prstGeom>
-          <a:solidFill>
-            <a:srgbClr val="00BCD4"/>
-          </a:solidFill>
-          <a:ln/>
-        </p:spPr>
-      </p:sp>
-      <p:sp>
-        <p:nvSpPr>
-          <p:cNvPr id="7" name="Text 5"/>
-          <p:cNvSpPr/>
-          <p:nvPr/>
-        </p:nvSpPr>
-        <p:spPr>
-          <a:xfrm>
-            <a:off x="777240" y="1865376"/>
-            <a:ext cx="585216" cy="585216"/>
-          </a:xfrm>
-          <a:prstGeom prst="rect">
-            <a:avLst/>
-          </a:prstGeom>
-          <a:noFill/>
-          <a:ln/>
-        </p:spPr>
-        <p:txBody>
-          <a:bodyPr wrap="square" rtlCol="0" anchor="ctr"/>
-          <a:lstStyle/>
-          <a:p>
-            <a:pPr algn="ctr" indent="0" marL="0">
-              <a:buNone/>
-            </a:pPr>
-            <a:r>
-              <a:rPr lang="en-US" sz="1600" b="1" dirty="0">
-                <a:solidFill>
-                  <a:srgbClr val="14181C"/>
-                </a:solidFill>
-                <a:latin typeface="Calibri" pitchFamily="34" charset="0"/>
-                <a:ea typeface="Calibri" pitchFamily="34" charset="-122"/>
-                <a:cs typeface="Calibri" pitchFamily="34" charset="-120"/>
-              </a:rPr>
-              <a:t>⇄</a:t>
-            </a:r>
-            <a:endParaRPr lang="en-US" sz="1600" dirty="0"/>
-          </a:p>
-        </p:txBody>
-      </p:sp>
-      <p:sp>
-        <p:nvSpPr>
-          <p:cNvPr id="8" name="Text 6"/>
-          <p:cNvSpPr/>
-          <p:nvPr/>
-        </p:nvSpPr>
-        <p:spPr>
-          <a:xfrm>
-            <a:off x="1600200" y="1783080"/>
-            <a:ext cx="2743200" cy="749808"/>
-          </a:xfrm>
-          <a:prstGeom prst="rect">
-            <a:avLst/>
-          </a:prstGeom>
-          <a:noFill/>
-          <a:ln/>
-        </p:spPr>
-        <p:txBody>
-          <a:bodyPr wrap="square" rtlCol="0" anchor="ctr"/>
+          <p:cNvPr id="5" name="Text 3"/>
+          <p:cNvSpPr/>
+          <p:nvPr/>
+        </p:nvSpPr>
+        <p:spPr>
+          <a:xfrm>
+            <a:off x="548640" y="1572768"/>
+            <a:ext cx="6949440" cy="292608"/>
+          </a:xfrm>
+          <a:prstGeom prst="rect">
+            <a:avLst/>
+          </a:prstGeom>
+          <a:noFill/>
+          <a:ln/>
+        </p:spPr>
+        <p:txBody>
+          <a:bodyPr wrap="square" lIns="0" tIns="0" rIns="0" bIns="0" rtlCol="0" anchor="ctr"/>
           <a:lstStyle/>
           <a:p>
             <a:pPr indent="0" marL="0">
               <a:buNone/>
             </a:pPr>
             <a:r>
-              <a:rPr lang="en-US" sz="1400" b="1" dirty="0">
-                <a:solidFill>
-                  <a:srgbClr val="16202A"/>
-                </a:solidFill>
-                <a:latin typeface="Calibri" pitchFamily="34" charset="0"/>
-                <a:ea typeface="Calibri" pitchFamily="34" charset="-122"/>
-                <a:cs typeface="Calibri" pitchFamily="34" charset="-120"/>
-              </a:rPr>
-              <a:t>Static Correlation</a:t>
-            </a:r>
-            <a:endParaRPr lang="en-US" sz="1400" dirty="0"/>
-          </a:p>
-        </p:txBody>
-      </p:sp>
-      <p:sp>
-        <p:nvSpPr>
-          <p:cNvPr id="9" name="Text 7"/>
-          <p:cNvSpPr/>
-          <p:nvPr/>
-        </p:nvSpPr>
-        <p:spPr>
-          <a:xfrm>
-            <a:off x="4480560" y="1783080"/>
-            <a:ext cx="6492240" cy="749808"/>
-          </a:xfrm>
-          <a:prstGeom prst="rect">
-            <a:avLst/>
-          </a:prstGeom>
-          <a:noFill/>
-          <a:ln/>
-        </p:spPr>
-        <p:txBody>
-          <a:bodyPr wrap="square" rtlCol="0" anchor="ctr"/>
+              <a:rPr lang="en-US" sz="1100" b="1" spc="50" kern="0" dirty="0">
+                <a:solidFill>
+                  <a:srgbClr val="0097A7"/>
+                </a:solidFill>
+                <a:latin typeface="Calibri" pitchFamily="34" charset="0"/>
+                <a:ea typeface="Calibri" pitchFamily="34" charset="-122"/>
+                <a:cs typeface="Calibri" pitchFamily="34" charset="-120"/>
+              </a:rPr>
+              <a:t>Correlation to the S&amp;P 500 — calm markets vs. the worst 10% of equity days</a:t>
+            </a:r>
+            <a:endParaRPr lang="en-US" sz="1100" dirty="0"/>
+          </a:p>
+        </p:txBody>
+      </p:sp>
+      <p:graphicFrame>
+        <p:nvGraphicFramePr>
+          <p:cNvPr id="6" name="Chart 0" descr=""/>
+          <p:cNvGraphicFramePr/>
+          <p:nvPr/>
+        </p:nvGraphicFramePr>
+        <p:xfrm>
+          <a:off x="457200" y="1920240"/>
+          <a:ext cx="7132320" cy="3429000"/>
+        </p:xfrm>
+        <a:graphic xmlns:a="http://schemas.openxmlformats.org/drawingml/2006/main">
+          <a:graphicData uri="http://schemas.openxmlformats.org/drawingml/2006/chart">
+            <c:chart xmlns:c="http://schemas.openxmlformats.org/drawingml/2006/chart" r:id="rId1"/>
+          </a:graphicData>
+        </a:graphic>
+      </p:graphicFrame>
+      <p:sp>
+        <p:nvSpPr>
+          <p:cNvPr id="7" name="Text 4"/>
+          <p:cNvSpPr/>
+          <p:nvPr/>
+        </p:nvSpPr>
+        <p:spPr>
+          <a:xfrm>
+            <a:off x="548640" y="5440680"/>
+            <a:ext cx="6949440" cy="502920"/>
+          </a:xfrm>
+          <a:prstGeom prst="rect">
+            <a:avLst/>
+          </a:prstGeom>
+          <a:noFill/>
+          <a:ln/>
+        </p:spPr>
+        <p:txBody>
+          <a:bodyPr wrap="square" lIns="0" tIns="0" rIns="0" bIns="0" rtlCol="0" anchor="ctr"/>
           <a:lstStyle/>
           <a:p>
             <a:pPr indent="0" marL="0">
@@ -12348,7 +12662,7 @@
               <a:buNone/>
             </a:pPr>
             <a:r>
-              <a:rPr lang="en-US" sz="1200" dirty="0">
+              <a:rPr lang="en-US" sz="1150" i="1" dirty="0">
                 <a:solidFill>
                   <a:srgbClr val="5B6B76"/>
                 </a:solidFill>
@@ -12356,26 +12670,26 @@
                 <a:ea typeface="Calibri" pitchFamily="34" charset="-122"/>
                 <a:cs typeface="Calibri" pitchFamily="34" charset="-120"/>
               </a:rPr>
-              <a:t>Pearson correlation of daily returns across all 6 coins and 5 macro assets, side by side in one matrix</a:t>
-            </a:r>
-            <a:endParaRPr lang="en-US" sz="1200" dirty="0"/>
-          </a:p>
-        </p:txBody>
-      </p:sp>
-      <p:sp>
-        <p:nvSpPr>
-          <p:cNvPr id="10" name="Shape 8"/>
-          <p:cNvSpPr/>
-          <p:nvPr/>
-        </p:nvSpPr>
-        <p:spPr>
-          <a:xfrm>
-            <a:off x="548640" y="2788920"/>
-            <a:ext cx="10607040" cy="932688"/>
+              <a:t>Every coin — no exceptions — becomes more correlated with equities on the days equities fall hardest.</a:t>
+            </a:r>
+            <a:endParaRPr lang="en-US" sz="1150" dirty="0"/>
+          </a:p>
+        </p:txBody>
+      </p:sp>
+      <p:sp>
+        <p:nvSpPr>
+          <p:cNvPr id="8" name="Shape 5"/>
+          <p:cNvSpPr/>
+          <p:nvPr/>
+        </p:nvSpPr>
+        <p:spPr>
+          <a:xfrm>
+            <a:off x="7818120" y="1572768"/>
+            <a:ext cx="3840480" cy="1600200"/>
           </a:xfrm>
           <a:prstGeom prst="roundRect">
             <a:avLst>
-              <a:gd name="adj" fmla="val 7843"/>
+              <a:gd name="adj" fmla="val 4571"/>
             </a:avLst>
           </a:prstGeom>
           <a:solidFill>
@@ -12386,121 +12700,101 @@
       </p:sp>
       <p:sp>
         <p:nvSpPr>
-          <p:cNvPr id="11" name="Shape 9"/>
-          <p:cNvSpPr/>
-          <p:nvPr/>
-        </p:nvSpPr>
-        <p:spPr>
-          <a:xfrm>
-            <a:off x="777240" y="2962656"/>
-            <a:ext cx="585216" cy="585216"/>
-          </a:xfrm>
-          <a:prstGeom prst="ellipse">
-            <a:avLst/>
-          </a:prstGeom>
-          <a:solidFill>
-            <a:srgbClr val="00BCD4"/>
-          </a:solidFill>
-          <a:ln/>
-        </p:spPr>
-      </p:sp>
-      <p:sp>
-        <p:nvSpPr>
-          <p:cNvPr id="12" name="Text 10"/>
-          <p:cNvSpPr/>
-          <p:nvPr/>
-        </p:nvSpPr>
-        <p:spPr>
-          <a:xfrm>
-            <a:off x="777240" y="2962656"/>
-            <a:ext cx="585216" cy="585216"/>
-          </a:xfrm>
-          <a:prstGeom prst="rect">
-            <a:avLst/>
-          </a:prstGeom>
-          <a:noFill/>
-          <a:ln/>
-        </p:spPr>
-        <p:txBody>
-          <a:bodyPr wrap="square" rtlCol="0" anchor="ctr"/>
-          <a:lstStyle/>
-          <a:p>
-            <a:pPr algn="ctr" indent="0" marL="0">
-              <a:buNone/>
-            </a:pPr>
-            <a:r>
-              <a:rPr lang="en-US" sz="1600" b="1" dirty="0">
-                <a:solidFill>
-                  <a:srgbClr val="14181C"/>
-                </a:solidFill>
-                <a:latin typeface="Calibri" pitchFamily="34" charset="0"/>
-                <a:ea typeface="Calibri" pitchFamily="34" charset="-122"/>
-                <a:cs typeface="Calibri" pitchFamily="34" charset="-120"/>
-              </a:rPr>
-              <a:t>⇄</a:t>
-            </a:r>
-            <a:endParaRPr lang="en-US" sz="1600" dirty="0"/>
-          </a:p>
-        </p:txBody>
-      </p:sp>
-      <p:sp>
-        <p:nvSpPr>
-          <p:cNvPr id="13" name="Text 11"/>
-          <p:cNvSpPr/>
-          <p:nvPr/>
-        </p:nvSpPr>
-        <p:spPr>
-          <a:xfrm>
-            <a:off x="1600200" y="2880360"/>
-            <a:ext cx="2743200" cy="749808"/>
-          </a:xfrm>
-          <a:prstGeom prst="rect">
-            <a:avLst/>
-          </a:prstGeom>
-          <a:noFill/>
-          <a:ln/>
-        </p:spPr>
-        <p:txBody>
-          <a:bodyPr wrap="square" rtlCol="0" anchor="ctr"/>
+          <p:cNvPr id="9" name="Text 6"/>
+          <p:cNvSpPr/>
+          <p:nvPr/>
+        </p:nvSpPr>
+        <p:spPr>
+          <a:xfrm>
+            <a:off x="8092440" y="1737360"/>
+            <a:ext cx="3291840" cy="256032"/>
+          </a:xfrm>
+          <a:prstGeom prst="rect">
+            <a:avLst/>
+          </a:prstGeom>
+          <a:noFill/>
+          <a:ln/>
+        </p:spPr>
+        <p:txBody>
+          <a:bodyPr wrap="square" lIns="0" tIns="0" rIns="0" bIns="0" rtlCol="0" anchor="ctr"/>
           <a:lstStyle/>
           <a:p>
             <a:pPr indent="0" marL="0">
               <a:buNone/>
             </a:pPr>
             <a:r>
-              <a:rPr lang="en-US" sz="1400" b="1" dirty="0">
+              <a:rPr lang="en-US" sz="900" b="1" spc="100" kern="0" dirty="0">
+                <a:solidFill>
+                  <a:srgbClr val="5B6B76"/>
+                </a:solidFill>
+                <a:latin typeface="Calibri" pitchFamily="34" charset="0"/>
+                <a:ea typeface="Calibri" pitchFamily="34" charset="-122"/>
+                <a:cs typeface="Calibri" pitchFamily="34" charset="-120"/>
+              </a:rPr>
+              <a:t>THE FULL-SAMPLE NUMBER</a:t>
+            </a:r>
+            <a:endParaRPr lang="en-US" sz="900" dirty="0"/>
+          </a:p>
+        </p:txBody>
+      </p:sp>
+      <p:sp>
+        <p:nvSpPr>
+          <p:cNvPr id="10" name="Text 7"/>
+          <p:cNvSpPr/>
+          <p:nvPr/>
+        </p:nvSpPr>
+        <p:spPr>
+          <a:xfrm>
+            <a:off x="8092440" y="1993392"/>
+            <a:ext cx="3291840" cy="548640"/>
+          </a:xfrm>
+          <a:prstGeom prst="rect">
+            <a:avLst/>
+          </a:prstGeom>
+          <a:noFill/>
+          <a:ln/>
+        </p:spPr>
+        <p:txBody>
+          <a:bodyPr wrap="square" lIns="0" tIns="0" rIns="0" bIns="0" rtlCol="0" anchor="ctr"/>
+          <a:lstStyle/>
+          <a:p>
+            <a:pPr indent="0" marL="0">
+              <a:buNone/>
+            </a:pPr>
+            <a:r>
+              <a:rPr lang="en-US" sz="3400" b="1" dirty="0">
                 <a:solidFill>
                   <a:srgbClr val="16202A"/>
                 </a:solidFill>
-                <a:latin typeface="Calibri" pitchFamily="34" charset="0"/>
-                <a:ea typeface="Calibri" pitchFamily="34" charset="-122"/>
-                <a:cs typeface="Calibri" pitchFamily="34" charset="-120"/>
-              </a:rPr>
-              <a:t>Rolling Correlation</a:t>
-            </a:r>
-            <a:endParaRPr lang="en-US" sz="1400" dirty="0"/>
-          </a:p>
-        </p:txBody>
-      </p:sp>
-      <p:sp>
-        <p:nvSpPr>
-          <p:cNvPr id="14" name="Text 12"/>
-          <p:cNvSpPr/>
-          <p:nvPr/>
-        </p:nvSpPr>
-        <p:spPr>
-          <a:xfrm>
-            <a:off x="4480560" y="2880360"/>
-            <a:ext cx="6492240" cy="749808"/>
-          </a:xfrm>
-          <a:prstGeom prst="rect">
-            <a:avLst/>
-          </a:prstGeom>
-          <a:noFill/>
-          <a:ln/>
-        </p:spPr>
-        <p:txBody>
-          <a:bodyPr wrap="square" rtlCol="0" anchor="ctr"/>
+                <a:latin typeface="Cambria" pitchFamily="34" charset="0"/>
+                <a:ea typeface="Cambria" pitchFamily="34" charset="-122"/>
+                <a:cs typeface="Cambria" pitchFamily="34" charset="-120"/>
+              </a:rPr>
+              <a:t>+0.07</a:t>
+            </a:r>
+            <a:endParaRPr lang="en-US" sz="3400" dirty="0"/>
+          </a:p>
+        </p:txBody>
+      </p:sp>
+      <p:sp>
+        <p:nvSpPr>
+          <p:cNvPr id="11" name="Text 8"/>
+          <p:cNvSpPr/>
+          <p:nvPr/>
+        </p:nvSpPr>
+        <p:spPr>
+          <a:xfrm>
+            <a:off x="8092440" y="2542032"/>
+            <a:ext cx="3291840" cy="566928"/>
+          </a:xfrm>
+          <a:prstGeom prst="rect">
+            <a:avLst/>
+          </a:prstGeom>
+          <a:noFill/>
+          <a:ln/>
+        </p:spPr>
+        <p:txBody>
+          <a:bodyPr wrap="square" lIns="0" tIns="0" rIns="0" bIns="0" rtlCol="0" anchor="ctr"/>
           <a:lstStyle/>
           <a:p>
             <a:pPr indent="0" marL="0">
@@ -12510,7 +12804,7 @@
               <a:buNone/>
             </a:pPr>
             <a:r>
-              <a:rPr lang="en-US" sz="1200" dirty="0">
+              <a:rPr lang="en-US" sz="1030" dirty="0">
                 <a:solidFill>
                   <a:srgbClr val="5B6B76"/>
                 </a:solidFill>
@@ -12518,339 +12812,202 @@
                 <a:ea typeface="Calibri" pitchFamily="34" charset="-122"/>
                 <a:cs typeface="Calibri" pitchFamily="34" charset="-120"/>
               </a:rPr>
-              <a:t>Recomputed over a moving window — the crypto/equity relationship is regime-dependent and shifts over time, not fixed</a:t>
-            </a:r>
-            <a:endParaRPr lang="en-US" sz="1200" dirty="0"/>
-          </a:p>
-        </p:txBody>
-      </p:sp>
-      <p:sp>
-        <p:nvSpPr>
-          <p:cNvPr id="15" name="Shape 13"/>
-          <p:cNvSpPr/>
-          <p:nvPr/>
-        </p:nvSpPr>
-        <p:spPr>
-          <a:xfrm>
-            <a:off x="548640" y="3886200"/>
-            <a:ext cx="10607040" cy="932688"/>
+              <a:t>BTC to S&amp;P 500 across all 250 days — near zero. On this alone, crypto looks like a perfect diversifier.</a:t>
+            </a:r>
+            <a:endParaRPr lang="en-US" sz="1030" dirty="0"/>
+          </a:p>
+        </p:txBody>
+      </p:sp>
+      <p:sp>
+        <p:nvSpPr>
+          <p:cNvPr id="12" name="Text 9"/>
+          <p:cNvSpPr/>
+          <p:nvPr/>
+        </p:nvSpPr>
+        <p:spPr>
+          <a:xfrm>
+            <a:off x="8092440" y="3255264"/>
+            <a:ext cx="3291840" cy="274320"/>
+          </a:xfrm>
+          <a:prstGeom prst="rect">
+            <a:avLst/>
+          </a:prstGeom>
+          <a:noFill/>
+          <a:ln/>
+        </p:spPr>
+        <p:txBody>
+          <a:bodyPr wrap="square" lIns="0" tIns="0" rIns="0" bIns="0" rtlCol="0" anchor="ctr"/>
+          <a:lstStyle/>
+          <a:p>
+            <a:pPr indent="0" marL="0">
+              <a:buNone/>
+            </a:pPr>
+            <a:r>
+              <a:rPr lang="en-US" sz="1050" b="1" i="1" dirty="0">
+                <a:solidFill>
+                  <a:srgbClr val="0097A7"/>
+                </a:solidFill>
+                <a:latin typeface="Calibri" pitchFamily="34" charset="0"/>
+                <a:ea typeface="Calibri" pitchFamily="34" charset="-122"/>
+                <a:cs typeface="Calibri" pitchFamily="34" charset="-120"/>
+              </a:rPr>
+              <a:t>↓  split the sample</a:t>
+            </a:r>
+            <a:endParaRPr lang="en-US" sz="1050" dirty="0"/>
+          </a:p>
+        </p:txBody>
+      </p:sp>
+      <p:sp>
+        <p:nvSpPr>
+          <p:cNvPr id="13" name="Shape 10"/>
+          <p:cNvSpPr/>
+          <p:nvPr/>
+        </p:nvSpPr>
+        <p:spPr>
+          <a:xfrm>
+            <a:off x="7818120" y="3611880"/>
+            <a:ext cx="3840480" cy="2331720"/>
           </a:xfrm>
           <a:prstGeom prst="roundRect">
             <a:avLst>
-              <a:gd name="adj" fmla="val 7843"/>
+              <a:gd name="adj" fmla="val 3137"/>
             </a:avLst>
           </a:prstGeom>
           <a:solidFill>
-            <a:srgbClr val="F1F5F6"/>
+            <a:srgbClr val="1D2329"/>
           </a:solidFill>
           <a:ln/>
-        </p:spPr>
-      </p:sp>
-      <p:sp>
-        <p:nvSpPr>
-          <p:cNvPr id="16" name="Shape 14"/>
-          <p:cNvSpPr/>
-          <p:nvPr/>
-        </p:nvSpPr>
-        <p:spPr>
-          <a:xfrm>
-            <a:off x="777240" y="4059936"/>
-            <a:ext cx="585216" cy="585216"/>
-          </a:xfrm>
-          <a:prstGeom prst="ellipse">
-            <a:avLst/>
-          </a:prstGeom>
-          <a:solidFill>
-            <a:srgbClr val="00BCD4"/>
-          </a:solidFill>
-          <a:ln/>
-        </p:spPr>
-      </p:sp>
-      <p:sp>
-        <p:nvSpPr>
-          <p:cNvPr id="17" name="Text 15"/>
-          <p:cNvSpPr/>
-          <p:nvPr/>
-        </p:nvSpPr>
-        <p:spPr>
-          <a:xfrm>
-            <a:off x="777240" y="4059936"/>
-            <a:ext cx="585216" cy="585216"/>
-          </a:xfrm>
-          <a:prstGeom prst="rect">
-            <a:avLst/>
-          </a:prstGeom>
-          <a:noFill/>
-          <a:ln/>
-        </p:spPr>
-        <p:txBody>
-          <a:bodyPr wrap="square" rtlCol="0" anchor="ctr"/>
-          <a:lstStyle/>
-          <a:p>
-            <a:pPr algn="ctr" indent="0" marL="0">
-              <a:buNone/>
-            </a:pPr>
-            <a:r>
-              <a:rPr lang="en-US" sz="1600" b="1" dirty="0">
-                <a:solidFill>
-                  <a:srgbClr val="14181C"/>
-                </a:solidFill>
-                <a:latin typeface="Calibri" pitchFamily="34" charset="0"/>
-                <a:ea typeface="Calibri" pitchFamily="34" charset="-122"/>
-                <a:cs typeface="Calibri" pitchFamily="34" charset="-120"/>
-              </a:rPr>
-              <a:t>⇄</a:t>
-            </a:r>
-            <a:endParaRPr lang="en-US" sz="1600" dirty="0"/>
-          </a:p>
-        </p:txBody>
-      </p:sp>
-      <p:sp>
-        <p:nvSpPr>
-          <p:cNvPr id="18" name="Text 16"/>
-          <p:cNvSpPr/>
-          <p:nvPr/>
-        </p:nvSpPr>
-        <p:spPr>
-          <a:xfrm>
-            <a:off x="1600200" y="3977640"/>
-            <a:ext cx="2743200" cy="749808"/>
-          </a:xfrm>
-          <a:prstGeom prst="rect">
-            <a:avLst/>
-          </a:prstGeom>
-          <a:noFill/>
-          <a:ln/>
-        </p:spPr>
-        <p:txBody>
-          <a:bodyPr wrap="square" rtlCol="0" anchor="ctr"/>
+          <a:effectLst>
+            <a:outerShdw sx="100000" sy="100000" kx="0" ky="0" algn="bl" rotWithShape="0" blurRad="101600" dist="38100" dir="5400000">
+              <a:srgbClr val="000000">
+                <a:alpha val="35000"/>
+              </a:srgbClr>
+            </a:outerShdw>
+          </a:effectLst>
+        </p:spPr>
+      </p:sp>
+      <p:sp>
+        <p:nvSpPr>
+          <p:cNvPr id="14" name="Text 11"/>
+          <p:cNvSpPr/>
+          <p:nvPr/>
+        </p:nvSpPr>
+        <p:spPr>
+          <a:xfrm>
+            <a:off x="8092440" y="3794760"/>
+            <a:ext cx="3291840" cy="256032"/>
+          </a:xfrm>
+          <a:prstGeom prst="rect">
+            <a:avLst/>
+          </a:prstGeom>
+          <a:noFill/>
+          <a:ln/>
+        </p:spPr>
+        <p:txBody>
+          <a:bodyPr wrap="square" lIns="0" tIns="0" rIns="0" bIns="0" rtlCol="0" anchor="ctr"/>
           <a:lstStyle/>
           <a:p>
             <a:pPr indent="0" marL="0">
               <a:buNone/>
             </a:pPr>
             <a:r>
-              <a:rPr lang="en-US" sz="1400" b="1" dirty="0">
-                <a:solidFill>
-                  <a:srgbClr val="16202A"/>
-                </a:solidFill>
-                <a:latin typeface="Calibri" pitchFamily="34" charset="0"/>
-                <a:ea typeface="Calibri" pitchFamily="34" charset="-122"/>
-                <a:cs typeface="Calibri" pitchFamily="34" charset="-120"/>
-              </a:rPr>
-              <a:t>Beta</a:t>
-            </a:r>
-            <a:endParaRPr lang="en-US" sz="1400" dirty="0"/>
-          </a:p>
-        </p:txBody>
-      </p:sp>
-      <p:sp>
-        <p:nvSpPr>
-          <p:cNvPr id="19" name="Text 17"/>
-          <p:cNvSpPr/>
-          <p:nvPr/>
-        </p:nvSpPr>
-        <p:spPr>
-          <a:xfrm>
-            <a:off x="4480560" y="3977640"/>
-            <a:ext cx="6492240" cy="749808"/>
-          </a:xfrm>
-          <a:prstGeom prst="rect">
-            <a:avLst/>
-          </a:prstGeom>
-          <a:noFill/>
-          <a:ln/>
-        </p:spPr>
-        <p:txBody>
-          <a:bodyPr wrap="square" rtlCol="0" anchor="ctr"/>
+              <a:rPr lang="en-US" sz="900" b="1" spc="100" kern="0" dirty="0">
+                <a:solidFill>
+                  <a:srgbClr val="00BCD4"/>
+                </a:solidFill>
+                <a:latin typeface="Calibri" pitchFamily="34" charset="0"/>
+                <a:ea typeface="Calibri" pitchFamily="34" charset="-122"/>
+                <a:cs typeface="Calibri" pitchFamily="34" charset="-120"/>
+              </a:rPr>
+              <a:t>WHAT ACTUALLY HAPPENS</a:t>
+            </a:r>
+            <a:endParaRPr lang="en-US" sz="900" dirty="0"/>
+          </a:p>
+        </p:txBody>
+      </p:sp>
+      <p:sp>
+        <p:nvSpPr>
+          <p:cNvPr id="15" name="Text 12"/>
+          <p:cNvSpPr/>
+          <p:nvPr/>
+        </p:nvSpPr>
+        <p:spPr>
+          <a:xfrm>
+            <a:off x="8092440" y="4114800"/>
+            <a:ext cx="3291840" cy="1691640"/>
+          </a:xfrm>
+          <a:prstGeom prst="rect">
+            <a:avLst/>
+          </a:prstGeom>
+          <a:noFill/>
+          <a:ln/>
+        </p:spPr>
+        <p:txBody>
+          <a:bodyPr wrap="square" lIns="0" tIns="0" rIns="0" bIns="0" rtlCol="0" anchor="t"/>
           <a:lstStyle/>
           <a:p>
             <a:pPr indent="0" marL="0">
               <a:lnSpc>
-                <a:spcPct val="120000"/>
+                <a:spcPct val="125000"/>
               </a:lnSpc>
               <a:buNone/>
             </a:pPr>
             <a:r>
-              <a:rPr lang="en-US" sz="1200" dirty="0">
-                <a:solidFill>
-                  <a:srgbClr val="5B6B76"/>
-                </a:solidFill>
-                <a:latin typeface="Calibri" pitchFamily="34" charset="0"/>
-                <a:ea typeface="Calibri" pitchFamily="34" charset="-122"/>
-                <a:cs typeface="Calibri" pitchFamily="34" charset="-120"/>
-              </a:rPr>
-              <a:t>How sharply an asset's returns swing relative to a benchmark like the S&amp;P 500</a:t>
-            </a:r>
-            <a:endParaRPr lang="en-US" sz="1200" dirty="0"/>
-          </a:p>
-        </p:txBody>
-      </p:sp>
-      <p:sp>
-        <p:nvSpPr>
-          <p:cNvPr id="20" name="Shape 18"/>
-          <p:cNvSpPr/>
-          <p:nvPr/>
-        </p:nvSpPr>
-        <p:spPr>
-          <a:xfrm>
-            <a:off x="548640" y="4983480"/>
-            <a:ext cx="10607040" cy="932688"/>
-          </a:xfrm>
-          <a:prstGeom prst="roundRect">
-            <a:avLst>
-              <a:gd name="adj" fmla="val 7843"/>
-            </a:avLst>
-          </a:prstGeom>
-          <a:solidFill>
-            <a:srgbClr val="F1F5F6"/>
-          </a:solidFill>
-          <a:ln/>
-        </p:spPr>
-      </p:sp>
-      <p:sp>
-        <p:nvSpPr>
-          <p:cNvPr id="21" name="Shape 19"/>
-          <p:cNvSpPr/>
-          <p:nvPr/>
-        </p:nvSpPr>
-        <p:spPr>
-          <a:xfrm>
-            <a:off x="777240" y="5157216"/>
-            <a:ext cx="585216" cy="585216"/>
-          </a:xfrm>
-          <a:prstGeom prst="ellipse">
-            <a:avLst/>
-          </a:prstGeom>
-          <a:solidFill>
-            <a:srgbClr val="00BCD4"/>
-          </a:solidFill>
-          <a:ln/>
-        </p:spPr>
-      </p:sp>
-      <p:sp>
-        <p:nvSpPr>
-          <p:cNvPr id="22" name="Text 20"/>
-          <p:cNvSpPr/>
-          <p:nvPr/>
-        </p:nvSpPr>
-        <p:spPr>
-          <a:xfrm>
-            <a:off x="777240" y="5157216"/>
-            <a:ext cx="585216" cy="585216"/>
-          </a:xfrm>
-          <a:prstGeom prst="rect">
-            <a:avLst/>
-          </a:prstGeom>
-          <a:noFill/>
-          <a:ln/>
-        </p:spPr>
-        <p:txBody>
-          <a:bodyPr wrap="square" rtlCol="0" anchor="ctr"/>
-          <a:lstStyle/>
-          <a:p>
-            <a:pPr algn="ctr" indent="0" marL="0">
-              <a:buNone/>
-            </a:pPr>
-            <a:r>
-              <a:rPr lang="en-US" sz="1600" b="1" dirty="0">
-                <a:solidFill>
-                  <a:srgbClr val="14181C"/>
-                </a:solidFill>
-                <a:latin typeface="Calibri" pitchFamily="34" charset="0"/>
-                <a:ea typeface="Calibri" pitchFamily="34" charset="-122"/>
-                <a:cs typeface="Calibri" pitchFamily="34" charset="-120"/>
-              </a:rPr>
-              <a:t>⇄</a:t>
-            </a:r>
-            <a:endParaRPr lang="en-US" sz="1600" dirty="0"/>
-          </a:p>
-        </p:txBody>
-      </p:sp>
-      <p:sp>
-        <p:nvSpPr>
-          <p:cNvPr id="23" name="Text 21"/>
-          <p:cNvSpPr/>
-          <p:nvPr/>
-        </p:nvSpPr>
-        <p:spPr>
-          <a:xfrm>
-            <a:off x="1600200" y="5074920"/>
-            <a:ext cx="2743200" cy="749808"/>
-          </a:xfrm>
-          <a:prstGeom prst="rect">
-            <a:avLst/>
-          </a:prstGeom>
-          <a:noFill/>
-          <a:ln/>
-        </p:spPr>
-        <p:txBody>
-          <a:bodyPr wrap="square" rtlCol="0" anchor="ctr"/>
-          <a:lstStyle/>
-          <a:p>
-            <a:pPr indent="0" marL="0">
-              <a:buNone/>
-            </a:pPr>
-            <a:r>
-              <a:rPr lang="en-US" sz="1400" b="1" dirty="0">
-                <a:solidFill>
-                  <a:srgbClr val="16202A"/>
-                </a:solidFill>
-                <a:latin typeface="Calibri" pitchFamily="34" charset="0"/>
-                <a:ea typeface="Calibri" pitchFamily="34" charset="-122"/>
-                <a:cs typeface="Calibri" pitchFamily="34" charset="-120"/>
-              </a:rPr>
-              <a:t>Regime Correlation</a:t>
-            </a:r>
-            <a:endParaRPr lang="en-US" sz="1400" dirty="0"/>
-          </a:p>
-        </p:txBody>
-      </p:sp>
-      <p:sp>
-        <p:nvSpPr>
-          <p:cNvPr id="24" name="Text 22"/>
-          <p:cNvSpPr/>
-          <p:nvPr/>
-        </p:nvSpPr>
-        <p:spPr>
-          <a:xfrm>
-            <a:off x="4480560" y="5074920"/>
-            <a:ext cx="6492240" cy="749808"/>
-          </a:xfrm>
-          <a:prstGeom prst="rect">
-            <a:avLst/>
-          </a:prstGeom>
-          <a:noFill/>
-          <a:ln/>
-        </p:spPr>
-        <p:txBody>
-          <a:bodyPr wrap="square" rtlCol="0" anchor="ctr"/>
-          <a:lstStyle/>
+              <a:rPr lang="en-US" sz="1300" b="1" dirty="0">
+                <a:solidFill>
+                  <a:srgbClr val="F5F9FA"/>
+                </a:solidFill>
+                <a:latin typeface="Calibri" pitchFamily="34" charset="0"/>
+                <a:ea typeface="Calibri" pitchFamily="34" charset="-122"/>
+                <a:cs typeface="Calibri" pitchFamily="34" charset="-120"/>
+              </a:rPr>
+              <a:t>The diversification is real when you don't need it, and weakens exactly when you do.</a:t>
+            </a:r>
+            <a:endParaRPr lang="en-US" sz="1300" dirty="0"/>
+          </a:p>
           <a:p>
             <a:pPr indent="0" marL="0">
               <a:lnSpc>
-                <a:spcPct val="120000"/>
+                <a:spcPct val="125000"/>
               </a:lnSpc>
               <a:buNone/>
             </a:pPr>
             <a:r>
-              <a:rPr lang="en-US" sz="1200" dirty="0">
-                <a:solidFill>
-                  <a:srgbClr val="5B6B76"/>
-                </a:solidFill>
-                <a:latin typeface="Calibri" pitchFamily="34" charset="0"/>
-                <a:ea typeface="Calibri" pitchFamily="34" charset="-122"/>
-                <a:cs typeface="Calibri" pitchFamily="34" charset="-120"/>
-              </a:rPr>
-              <a:t>Correlation measured separately in calm markets vs. the benchmark's worst days — does crypto de-correlate exactly when it matters, or converge?</a:t>
-            </a:r>
-            <a:endParaRPr lang="en-US" sz="1200" dirty="0"/>
-          </a:p>
-        </p:txBody>
-      </p:sp>
-      <p:sp>
-        <p:nvSpPr>
-          <p:cNvPr id="25" name="Text 23"/>
+              <a:rPr lang="en-US" sz="500" dirty="0">
+                <a:solidFill>
+                  <a:srgbClr val="000000"/>
+                </a:solidFill>
+              </a:rPr>
+              <a:t>
+</a:t>
+            </a:r>
+            <a:endParaRPr lang="en-US" sz="1300" dirty="0"/>
+          </a:p>
+          <a:p>
+            <a:pPr indent="0" marL="0">
+              <a:lnSpc>
+                <a:spcPct val="125000"/>
+              </a:lnSpc>
+              <a:buNone/>
+            </a:pPr>
+            <a:r>
+              <a:rPr lang="en-US" sz="1100" dirty="0">
+                <a:solidFill>
+                  <a:srgbClr val="9FB0B8"/>
+                </a:solidFill>
+                <a:latin typeface="Calibri" pitchFamily="34" charset="0"/>
+                <a:ea typeface="Calibri" pitchFamily="34" charset="-122"/>
+                <a:cs typeface="Calibri" pitchFamily="34" charset="-120"/>
+              </a:rPr>
+              <a:t>ADA moves furthest — +0.10 to +0.32. A single full-window figure hides all of it.</a:t>
+            </a:r>
+            <a:endParaRPr lang="en-US" sz="1300" dirty="0"/>
+          </a:p>
+        </p:txBody>
+      </p:sp>
+      <p:sp>
+        <p:nvSpPr>
+          <p:cNvPr id="16" name="Text 13"/>
           <p:cNvSpPr/>
           <p:nvPr/>
         </p:nvSpPr>
@@ -12889,7 +13046,7 @@
       </p:sp>
       <p:sp>
         <p:nvSpPr>
-          <p:cNvPr id="26" name="Text 24"/>
+          <p:cNvPr id="17" name="Text 14"/>
           <p:cNvSpPr/>
           <p:nvPr/>
         </p:nvSpPr>
@@ -15221,33 +15378,1128 @@
           </a:p>
         </p:txBody>
       </p:sp>
-      <p:pic>
-        <p:nvPicPr>
-          <p:cNvPr id="5" name="Image 0" descr="C:\Users\garim\AppData\Local\Temp\pptxwork\assets\pipeline.png">    </p:cNvPr>
-          <p:cNvPicPr>
-            <a:picLocks noChangeAspect="1"/>
-          </p:cNvPicPr>
-          <p:nvPr/>
-        </p:nvPicPr>
-        <p:blipFill>
-          <a:blip r:embed="rId1"/>
-          <a:stretch>
-            <a:fillRect/>
-          </a:stretch>
-        </p:blipFill>
-        <p:spPr>
-          <a:xfrm>
-            <a:off x="1966839" y="1600200"/>
-            <a:ext cx="8258016" cy="4709160"/>
-          </a:xfrm>
-          <a:prstGeom prst="rect">
-            <a:avLst/>
-          </a:prstGeom>
-        </p:spPr>
-      </p:pic>
-      <p:sp>
-        <p:nvSpPr>
-          <p:cNvPr id="6" name="Text 3"/>
+      <p:sp>
+        <p:nvSpPr>
+          <p:cNvPr id="5" name="Shape 3"/>
+          <p:cNvSpPr/>
+          <p:nvPr/>
+        </p:nvSpPr>
+        <p:spPr>
+          <a:xfrm>
+            <a:off x="548640" y="2560320"/>
+            <a:ext cx="1965960" cy="2286000"/>
+          </a:xfrm>
+          <a:prstGeom prst="roundRect">
+            <a:avLst>
+              <a:gd name="adj" fmla="val 3721"/>
+            </a:avLst>
+          </a:prstGeom>
+          <a:solidFill>
+            <a:srgbClr val="F1F5F6"/>
+          </a:solidFill>
+          <a:ln w="15875">
+            <a:solidFill>
+              <a:srgbClr val="DCE4E6"/>
+            </a:solidFill>
+            <a:prstDash val="solid"/>
+          </a:ln>
+          <a:effectLst>
+            <a:outerShdw sx="100000" sy="100000" kx="0" ky="0" algn="bl" rotWithShape="0" blurRad="101600" dist="38100" dir="5400000">
+              <a:srgbClr val="000000">
+                <a:alpha val="10000"/>
+              </a:srgbClr>
+            </a:outerShdw>
+          </a:effectLst>
+        </p:spPr>
+      </p:sp>
+      <p:sp>
+        <p:nvSpPr>
+          <p:cNvPr id="6" name="Text 4"/>
+          <p:cNvSpPr/>
+          <p:nvPr/>
+        </p:nvSpPr>
+        <p:spPr>
+          <a:xfrm>
+            <a:off x="685800" y="2724912"/>
+            <a:ext cx="1691640" cy="411480"/>
+          </a:xfrm>
+          <a:prstGeom prst="rect">
+            <a:avLst/>
+          </a:prstGeom>
+          <a:noFill/>
+          <a:ln/>
+        </p:spPr>
+        <p:txBody>
+          <a:bodyPr wrap="square" lIns="0" tIns="0" rIns="0" bIns="0" rtlCol="0" anchor="ctr"/>
+          <a:lstStyle/>
+          <a:p>
+            <a:pPr algn="ctr" indent="0" marL="0">
+              <a:buNone/>
+            </a:pPr>
+            <a:r>
+              <a:rPr lang="en-US" sz="1250" b="1" dirty="0">
+                <a:solidFill>
+                  <a:srgbClr val="16202A"/>
+                </a:solidFill>
+                <a:latin typeface="Calibri" pitchFamily="34" charset="0"/>
+                <a:ea typeface="Calibri" pitchFamily="34" charset="-122"/>
+                <a:cs typeface="Calibri" pitchFamily="34" charset="-120"/>
+              </a:rPr>
+              <a:t>External APIs</a:t>
+            </a:r>
+            <a:endParaRPr lang="en-US" sz="1250" dirty="0"/>
+          </a:p>
+        </p:txBody>
+      </p:sp>
+      <p:sp>
+        <p:nvSpPr>
+          <p:cNvPr id="7" name="Text 5"/>
+          <p:cNvSpPr/>
+          <p:nvPr/>
+        </p:nvSpPr>
+        <p:spPr>
+          <a:xfrm>
+            <a:off x="685800" y="3127248"/>
+            <a:ext cx="1691640" cy="1572768"/>
+          </a:xfrm>
+          <a:prstGeom prst="rect">
+            <a:avLst/>
+          </a:prstGeom>
+          <a:noFill/>
+          <a:ln/>
+        </p:spPr>
+        <p:txBody>
+          <a:bodyPr wrap="square" lIns="0" tIns="0" rIns="0" bIns="0" rtlCol="0" anchor="ctr"/>
+          <a:lstStyle/>
+          <a:p>
+            <a:pPr algn="ctr" indent="0" marL="0">
+              <a:lnSpc>
+                <a:spcPct val="122000"/>
+              </a:lnSpc>
+              <a:buNone/>
+            </a:pPr>
+            <a:r>
+              <a:rPr lang="en-US" sz="960" dirty="0">
+                <a:solidFill>
+                  <a:srgbClr val="5B6B76"/>
+                </a:solidFill>
+                <a:latin typeface="Calibri" pitchFamily="34" charset="0"/>
+                <a:ea typeface="Calibri" pitchFamily="34" charset="-122"/>
+                <a:cs typeface="Calibri" pitchFamily="34" charset="-120"/>
+              </a:rPr>
+              <a:t>CoinGecko</a:t>
+            </a:r>
+            <a:endParaRPr lang="en-US" sz="960" dirty="0"/>
+          </a:p>
+          <a:p>
+            <a:pPr algn="ctr" indent="0" marL="0">
+              <a:lnSpc>
+                <a:spcPct val="122000"/>
+              </a:lnSpc>
+              <a:buNone/>
+            </a:pPr>
+            <a:r>
+              <a:rPr lang="en-US" sz="960" dirty="0">
+                <a:solidFill>
+                  <a:srgbClr val="5B6B76"/>
+                </a:solidFill>
+                <a:latin typeface="Calibri" pitchFamily="34" charset="0"/>
+                <a:ea typeface="Calibri" pitchFamily="34" charset="-122"/>
+                <a:cs typeface="Calibri" pitchFamily="34" charset="-120"/>
+              </a:rPr>
+              <a:t>Yahoo Finance</a:t>
+            </a:r>
+            <a:endParaRPr lang="en-US" sz="960" dirty="0"/>
+          </a:p>
+          <a:p>
+            <a:pPr algn="ctr" indent="0" marL="0">
+              <a:lnSpc>
+                <a:spcPct val="122000"/>
+              </a:lnSpc>
+              <a:buNone/>
+            </a:pPr>
+            <a:r>
+              <a:rPr lang="en-US" sz="960" dirty="0">
+                <a:solidFill>
+                  <a:srgbClr val="5B6B76"/>
+                </a:solidFill>
+                <a:latin typeface="Calibri" pitchFamily="34" charset="0"/>
+                <a:ea typeface="Calibri" pitchFamily="34" charset="-122"/>
+                <a:cs typeface="Calibri" pitchFamily="34" charset="-120"/>
+              </a:rPr>
+              <a:t>Fear &amp; Greed</a:t>
+            </a:r>
+            <a:endParaRPr lang="en-US" sz="960" dirty="0"/>
+          </a:p>
+          <a:p>
+            <a:pPr algn="ctr" indent="0" marL="0">
+              <a:lnSpc>
+                <a:spcPct val="122000"/>
+              </a:lnSpc>
+              <a:buNone/>
+            </a:pPr>
+            <a:r>
+              <a:rPr lang="en-US" sz="960" dirty="0">
+                <a:solidFill>
+                  <a:srgbClr val="5B6B76"/>
+                </a:solidFill>
+                <a:latin typeface="Calibri" pitchFamily="34" charset="0"/>
+                <a:ea typeface="Calibri" pitchFamily="34" charset="-122"/>
+                <a:cs typeface="Calibri" pitchFamily="34" charset="-120"/>
+              </a:rPr>
+              <a:t>Blockchain.info</a:t>
+            </a:r>
+            <a:endParaRPr lang="en-US" sz="960" dirty="0"/>
+          </a:p>
+        </p:txBody>
+      </p:sp>
+      <p:sp>
+        <p:nvSpPr>
+          <p:cNvPr id="8" name="Shape 6"/>
+          <p:cNvSpPr/>
+          <p:nvPr/>
+        </p:nvSpPr>
+        <p:spPr>
+          <a:xfrm>
+            <a:off x="2834640" y="2560320"/>
+            <a:ext cx="1965960" cy="2286000"/>
+          </a:xfrm>
+          <a:prstGeom prst="roundRect">
+            <a:avLst>
+              <a:gd name="adj" fmla="val 3721"/>
+            </a:avLst>
+          </a:prstGeom>
+          <a:solidFill>
+            <a:srgbClr val="14181C"/>
+          </a:solidFill>
+          <a:ln/>
+          <a:effectLst>
+            <a:outerShdw sx="100000" sy="100000" kx="0" ky="0" algn="bl" rotWithShape="0" blurRad="101600" dist="38100" dir="5400000">
+              <a:srgbClr val="000000">
+                <a:alpha val="28000"/>
+              </a:srgbClr>
+            </a:outerShdw>
+          </a:effectLst>
+        </p:spPr>
+      </p:sp>
+      <p:sp>
+        <p:nvSpPr>
+          <p:cNvPr id="9" name="Text 7"/>
+          <p:cNvSpPr/>
+          <p:nvPr/>
+        </p:nvSpPr>
+        <p:spPr>
+          <a:xfrm>
+            <a:off x="2971800" y="2724912"/>
+            <a:ext cx="1691640" cy="411480"/>
+          </a:xfrm>
+          <a:prstGeom prst="rect">
+            <a:avLst/>
+          </a:prstGeom>
+          <a:noFill/>
+          <a:ln/>
+        </p:spPr>
+        <p:txBody>
+          <a:bodyPr wrap="square" lIns="0" tIns="0" rIns="0" bIns="0" rtlCol="0" anchor="ctr"/>
+          <a:lstStyle/>
+          <a:p>
+            <a:pPr algn="ctr" indent="0" marL="0">
+              <a:buNone/>
+            </a:pPr>
+            <a:r>
+              <a:rPr lang="en-US" sz="1250" b="1" dirty="0">
+                <a:solidFill>
+                  <a:srgbClr val="F5F9FA"/>
+                </a:solidFill>
+                <a:latin typeface="Calibri" pitchFamily="34" charset="0"/>
+                <a:ea typeface="Calibri" pitchFamily="34" charset="-122"/>
+                <a:cs typeface="Calibri" pitchFamily="34" charset="-120"/>
+              </a:rPr>
+              <a:t>Ingestion</a:t>
+            </a:r>
+            <a:endParaRPr lang="en-US" sz="1250" dirty="0"/>
+          </a:p>
+        </p:txBody>
+      </p:sp>
+      <p:sp>
+        <p:nvSpPr>
+          <p:cNvPr id="10" name="Text 8"/>
+          <p:cNvSpPr/>
+          <p:nvPr/>
+        </p:nvSpPr>
+        <p:spPr>
+          <a:xfrm>
+            <a:off x="2971800" y="3127248"/>
+            <a:ext cx="1691640" cy="1572768"/>
+          </a:xfrm>
+          <a:prstGeom prst="rect">
+            <a:avLst/>
+          </a:prstGeom>
+          <a:noFill/>
+          <a:ln/>
+        </p:spPr>
+        <p:txBody>
+          <a:bodyPr wrap="square" lIns="0" tIns="0" rIns="0" bIns="0" rtlCol="0" anchor="ctr"/>
+          <a:lstStyle/>
+          <a:p>
+            <a:pPr algn="ctr" indent="0" marL="0">
+              <a:lnSpc>
+                <a:spcPct val="122000"/>
+              </a:lnSpc>
+              <a:buNone/>
+            </a:pPr>
+            <a:r>
+              <a:rPr lang="en-US" sz="960" dirty="0">
+                <a:solidFill>
+                  <a:srgbClr val="9FB0B8"/>
+                </a:solidFill>
+                <a:latin typeface="Calibri" pitchFamily="34" charset="0"/>
+                <a:ea typeface="Calibri" pitchFamily="34" charset="-122"/>
+                <a:cs typeface="Calibri" pitchFamily="34" charset="-120"/>
+              </a:rPr>
+              <a:t>throttle + retry</a:t>
+            </a:r>
+            <a:endParaRPr lang="en-US" sz="960" dirty="0"/>
+          </a:p>
+          <a:p>
+            <a:pPr algn="ctr" indent="0" marL="0">
+              <a:lnSpc>
+                <a:spcPct val="122000"/>
+              </a:lnSpc>
+              <a:buNone/>
+            </a:pPr>
+            <a:r>
+              <a:rPr lang="en-US" sz="960" dirty="0">
+                <a:solidFill>
+                  <a:srgbClr val="9FB0B8"/>
+                </a:solidFill>
+                <a:latin typeface="Calibri" pitchFamily="34" charset="0"/>
+                <a:ea typeface="Calibri" pitchFamily="34" charset="-122"/>
+                <a:cs typeface="Calibri" pitchFamily="34" charset="-120"/>
+              </a:rPr>
+              <a:t>6-hour disk cache</a:t>
+            </a:r>
+            <a:endParaRPr lang="en-US" sz="960" dirty="0"/>
+          </a:p>
+          <a:p>
+            <a:pPr algn="ctr" indent="0" marL="0">
+              <a:lnSpc>
+                <a:spcPct val="122000"/>
+              </a:lnSpc>
+              <a:buNone/>
+            </a:pPr>
+            <a:r>
+              <a:rPr lang="en-US" sz="960" dirty="0">
+                <a:solidFill>
+                  <a:srgbClr val="9FB0B8"/>
+                </a:solidFill>
+                <a:latin typeface="Calibri" pitchFamily="34" charset="0"/>
+                <a:ea typeface="Calibri" pitchFamily="34" charset="-122"/>
+                <a:cs typeface="Calibri" pitchFamily="34" charset="-120"/>
+              </a:rPr>
+              <a:t>synthetic fallback</a:t>
+            </a:r>
+            <a:endParaRPr lang="en-US" sz="960" dirty="0"/>
+          </a:p>
+          <a:p>
+            <a:pPr algn="ctr" indent="0" marL="0">
+              <a:lnSpc>
+                <a:spcPct val="122000"/>
+              </a:lnSpc>
+              <a:buNone/>
+            </a:pPr>
+            <a:r>
+              <a:rPr lang="en-US" sz="960" dirty="0">
+                <a:solidFill>
+                  <a:srgbClr val="9FB0B8"/>
+                </a:solidFill>
+                <a:latin typeface="Calibri" pitchFamily="34" charset="0"/>
+                <a:ea typeface="Calibri" pitchFamily="34" charset="-122"/>
+                <a:cs typeface="Calibri" pitchFamily="34" charset="-120"/>
+              </a:rPr>
+              <a:t>on any failure</a:t>
+            </a:r>
+            <a:endParaRPr lang="en-US" sz="960" dirty="0"/>
+          </a:p>
+        </p:txBody>
+      </p:sp>
+      <p:sp>
+        <p:nvSpPr>
+          <p:cNvPr id="11" name="Shape 9"/>
+          <p:cNvSpPr/>
+          <p:nvPr/>
+        </p:nvSpPr>
+        <p:spPr>
+          <a:xfrm>
+            <a:off x="5120640" y="2560320"/>
+            <a:ext cx="1965960" cy="2286000"/>
+          </a:xfrm>
+          <a:prstGeom prst="roundRect">
+            <a:avLst>
+              <a:gd name="adj" fmla="val 3721"/>
+            </a:avLst>
+          </a:prstGeom>
+          <a:solidFill>
+            <a:srgbClr val="00BCD4"/>
+          </a:solidFill>
+          <a:ln/>
+          <a:effectLst>
+            <a:outerShdw sx="100000" sy="100000" kx="0" ky="0" algn="bl" rotWithShape="0" blurRad="101600" dist="38100" dir="5400000">
+              <a:srgbClr val="000000">
+                <a:alpha val="28000"/>
+              </a:srgbClr>
+            </a:outerShdw>
+          </a:effectLst>
+        </p:spPr>
+      </p:sp>
+      <p:sp>
+        <p:nvSpPr>
+          <p:cNvPr id="12" name="Text 10"/>
+          <p:cNvSpPr/>
+          <p:nvPr/>
+        </p:nvSpPr>
+        <p:spPr>
+          <a:xfrm>
+            <a:off x="5257800" y="2724912"/>
+            <a:ext cx="1691640" cy="411480"/>
+          </a:xfrm>
+          <a:prstGeom prst="rect">
+            <a:avLst/>
+          </a:prstGeom>
+          <a:noFill/>
+          <a:ln/>
+        </p:spPr>
+        <p:txBody>
+          <a:bodyPr wrap="square" lIns="0" tIns="0" rIns="0" bIns="0" rtlCol="0" anchor="ctr"/>
+          <a:lstStyle/>
+          <a:p>
+            <a:pPr algn="ctr" indent="0" marL="0">
+              <a:buNone/>
+            </a:pPr>
+            <a:r>
+              <a:rPr lang="en-US" sz="1250" b="1" dirty="0">
+                <a:solidFill>
+                  <a:srgbClr val="14181C"/>
+                </a:solidFill>
+                <a:latin typeface="Calibri" pitchFamily="34" charset="0"/>
+                <a:ea typeface="Calibri" pitchFamily="34" charset="-122"/>
+                <a:cs typeface="Calibri" pitchFamily="34" charset="-120"/>
+              </a:rPr>
+              <a:t>MarketData</a:t>
+            </a:r>
+            <a:endParaRPr lang="en-US" sz="1250" dirty="0"/>
+          </a:p>
+        </p:txBody>
+      </p:sp>
+      <p:sp>
+        <p:nvSpPr>
+          <p:cNvPr id="13" name="Text 11"/>
+          <p:cNvSpPr/>
+          <p:nvPr/>
+        </p:nvSpPr>
+        <p:spPr>
+          <a:xfrm>
+            <a:off x="5257800" y="3127248"/>
+            <a:ext cx="1691640" cy="1572768"/>
+          </a:xfrm>
+          <a:prstGeom prst="rect">
+            <a:avLst/>
+          </a:prstGeom>
+          <a:noFill/>
+          <a:ln/>
+        </p:spPr>
+        <p:txBody>
+          <a:bodyPr wrap="square" lIns="0" tIns="0" rIns="0" bIns="0" rtlCol="0" anchor="ctr"/>
+          <a:lstStyle/>
+          <a:p>
+            <a:pPr algn="ctr" indent="0" marL="0">
+              <a:lnSpc>
+                <a:spcPct val="122000"/>
+              </a:lnSpc>
+              <a:buNone/>
+            </a:pPr>
+            <a:r>
+              <a:rPr lang="en-US" sz="960" dirty="0">
+                <a:solidFill>
+                  <a:srgbClr val="0D3B3F"/>
+                </a:solidFill>
+                <a:latin typeface="Calibri" pitchFamily="34" charset="0"/>
+                <a:ea typeface="Calibri" pitchFamily="34" charset="-122"/>
+                <a:cs typeface="Calibri" pitchFamily="34" charset="-120"/>
+              </a:rPr>
+              <a:t>one bundle:</a:t>
+            </a:r>
+            <a:endParaRPr lang="en-US" sz="960" dirty="0"/>
+          </a:p>
+          <a:p>
+            <a:pPr algn="ctr" indent="0" marL="0">
+              <a:lnSpc>
+                <a:spcPct val="122000"/>
+              </a:lnSpc>
+              <a:buNone/>
+            </a:pPr>
+            <a:r>
+              <a:rPr lang="en-US" sz="960" dirty="0">
+                <a:solidFill>
+                  <a:srgbClr val="0D3B3F"/>
+                </a:solidFill>
+                <a:latin typeface="Calibri" pitchFamily="34" charset="0"/>
+                <a:ea typeface="Calibri" pitchFamily="34" charset="-122"/>
+                <a:cs typeface="Calibri" pitchFamily="34" charset="-120"/>
+              </a:rPr>
+              <a:t>prices · macro</a:t>
+            </a:r>
+            <a:endParaRPr lang="en-US" sz="960" dirty="0"/>
+          </a:p>
+          <a:p>
+            <a:pPr algn="ctr" indent="0" marL="0">
+              <a:lnSpc>
+                <a:spcPct val="122000"/>
+              </a:lnSpc>
+              <a:buNone/>
+            </a:pPr>
+            <a:r>
+              <a:rPr lang="en-US" sz="960" dirty="0">
+                <a:solidFill>
+                  <a:srgbClr val="0D3B3F"/>
+                </a:solidFill>
+                <a:latin typeface="Calibri" pitchFamily="34" charset="0"/>
+                <a:ea typeface="Calibri" pitchFamily="34" charset="-122"/>
+                <a:cs typeface="Calibri" pitchFamily="34" charset="-120"/>
+              </a:rPr>
+              <a:t>sentiment · on-chain</a:t>
+            </a:r>
+            <a:endParaRPr lang="en-US" sz="960" dirty="0"/>
+          </a:p>
+          <a:p>
+            <a:pPr algn="ctr" indent="0" marL="0">
+              <a:lnSpc>
+                <a:spcPct val="122000"/>
+              </a:lnSpc>
+              <a:buNone/>
+            </a:pPr>
+            <a:r>
+              <a:rPr lang="en-US" sz="960" dirty="0">
+                <a:solidFill>
+                  <a:srgbClr val="0D3B3F"/>
+                </a:solidFill>
+                <a:latin typeface="Calibri" pitchFamily="34" charset="0"/>
+                <a:ea typeface="Calibri" pitchFamily="34" charset="-122"/>
+                <a:cs typeface="Calibri" pitchFamily="34" charset="-120"/>
+              </a:rPr>
+              <a:t>+ per-feed status</a:t>
+            </a:r>
+            <a:endParaRPr lang="en-US" sz="960" dirty="0"/>
+          </a:p>
+        </p:txBody>
+      </p:sp>
+      <p:sp>
+        <p:nvSpPr>
+          <p:cNvPr id="14" name="Shape 12"/>
+          <p:cNvSpPr/>
+          <p:nvPr/>
+        </p:nvSpPr>
+        <p:spPr>
+          <a:xfrm>
+            <a:off x="7406640" y="2153412"/>
+            <a:ext cx="1965960" cy="658368"/>
+          </a:xfrm>
+          <a:prstGeom prst="roundRect">
+            <a:avLst>
+              <a:gd name="adj" fmla="val 9722"/>
+            </a:avLst>
+          </a:prstGeom>
+          <a:solidFill>
+            <a:srgbClr val="14181C"/>
+          </a:solidFill>
+          <a:ln/>
+          <a:effectLst>
+            <a:outerShdw sx="100000" sy="100000" kx="0" ky="0" algn="bl" rotWithShape="0" blurRad="76200" dist="25400" dir="5400000">
+              <a:srgbClr val="000000">
+                <a:alpha val="22000"/>
+              </a:srgbClr>
+            </a:outerShdw>
+          </a:effectLst>
+        </p:spPr>
+      </p:sp>
+      <p:sp>
+        <p:nvSpPr>
+          <p:cNvPr id="15" name="Text 13"/>
+          <p:cNvSpPr/>
+          <p:nvPr/>
+        </p:nvSpPr>
+        <p:spPr>
+          <a:xfrm>
+            <a:off x="7498080" y="2153412"/>
+            <a:ext cx="1783080" cy="658368"/>
+          </a:xfrm>
+          <a:prstGeom prst="rect">
+            <a:avLst/>
+          </a:prstGeom>
+          <a:noFill/>
+          <a:ln/>
+        </p:spPr>
+        <p:txBody>
+          <a:bodyPr wrap="square" lIns="0" tIns="0" rIns="0" bIns="0" rtlCol="0" anchor="ctr"/>
+          <a:lstStyle/>
+          <a:p>
+            <a:pPr algn="ctr" indent="0" marL="0">
+              <a:buNone/>
+            </a:pPr>
+            <a:r>
+              <a:rPr lang="en-US" sz="1100" b="1" dirty="0">
+                <a:solidFill>
+                  <a:srgbClr val="F5F9FA"/>
+                </a:solidFill>
+                <a:latin typeface="Calibri" pitchFamily="34" charset="0"/>
+                <a:ea typeface="Calibri" pitchFamily="34" charset="-122"/>
+                <a:cs typeface="Calibri" pitchFamily="34" charset="-120"/>
+              </a:rPr>
+              <a:t>Volatility &amp; Risk</a:t>
+            </a:r>
+            <a:endParaRPr lang="en-US" sz="1100" dirty="0"/>
+          </a:p>
+        </p:txBody>
+      </p:sp>
+      <p:sp>
+        <p:nvSpPr>
+          <p:cNvPr id="16" name="Shape 14"/>
+          <p:cNvSpPr/>
+          <p:nvPr/>
+        </p:nvSpPr>
+        <p:spPr>
+          <a:xfrm>
+            <a:off x="7406640" y="2967228"/>
+            <a:ext cx="1965960" cy="658368"/>
+          </a:xfrm>
+          <a:prstGeom prst="roundRect">
+            <a:avLst>
+              <a:gd name="adj" fmla="val 9722"/>
+            </a:avLst>
+          </a:prstGeom>
+          <a:solidFill>
+            <a:srgbClr val="14181C"/>
+          </a:solidFill>
+          <a:ln/>
+          <a:effectLst>
+            <a:outerShdw sx="100000" sy="100000" kx="0" ky="0" algn="bl" rotWithShape="0" blurRad="76200" dist="25400" dir="5400000">
+              <a:srgbClr val="000000">
+                <a:alpha val="22000"/>
+              </a:srgbClr>
+            </a:outerShdw>
+          </a:effectLst>
+        </p:spPr>
+      </p:sp>
+      <p:sp>
+        <p:nvSpPr>
+          <p:cNvPr id="17" name="Text 15"/>
+          <p:cNvSpPr/>
+          <p:nvPr/>
+        </p:nvSpPr>
+        <p:spPr>
+          <a:xfrm>
+            <a:off x="7498080" y="2967228"/>
+            <a:ext cx="1783080" cy="658368"/>
+          </a:xfrm>
+          <a:prstGeom prst="rect">
+            <a:avLst/>
+          </a:prstGeom>
+          <a:noFill/>
+          <a:ln/>
+        </p:spPr>
+        <p:txBody>
+          <a:bodyPr wrap="square" lIns="0" tIns="0" rIns="0" bIns="0" rtlCol="0" anchor="ctr"/>
+          <a:lstStyle/>
+          <a:p>
+            <a:pPr algn="ctr" indent="0" marL="0">
+              <a:buNone/>
+            </a:pPr>
+            <a:r>
+              <a:rPr lang="en-US" sz="1100" b="1" dirty="0">
+                <a:solidFill>
+                  <a:srgbClr val="F5F9FA"/>
+                </a:solidFill>
+                <a:latin typeface="Calibri" pitchFamily="34" charset="0"/>
+                <a:ea typeface="Calibri" pitchFamily="34" charset="-122"/>
+                <a:cs typeface="Calibri" pitchFamily="34" charset="-120"/>
+              </a:rPr>
+              <a:t>Market Cycles</a:t>
+            </a:r>
+            <a:endParaRPr lang="en-US" sz="1100" dirty="0"/>
+          </a:p>
+        </p:txBody>
+      </p:sp>
+      <p:sp>
+        <p:nvSpPr>
+          <p:cNvPr id="18" name="Shape 16"/>
+          <p:cNvSpPr/>
+          <p:nvPr/>
+        </p:nvSpPr>
+        <p:spPr>
+          <a:xfrm>
+            <a:off x="7406640" y="3781044"/>
+            <a:ext cx="1965960" cy="658368"/>
+          </a:xfrm>
+          <a:prstGeom prst="roundRect">
+            <a:avLst>
+              <a:gd name="adj" fmla="val 9722"/>
+            </a:avLst>
+          </a:prstGeom>
+          <a:solidFill>
+            <a:srgbClr val="14181C"/>
+          </a:solidFill>
+          <a:ln/>
+          <a:effectLst>
+            <a:outerShdw sx="100000" sy="100000" kx="0" ky="0" algn="bl" rotWithShape="0" blurRad="76200" dist="25400" dir="5400000">
+              <a:srgbClr val="000000">
+                <a:alpha val="22000"/>
+              </a:srgbClr>
+            </a:outerShdw>
+          </a:effectLst>
+        </p:spPr>
+      </p:sp>
+      <p:sp>
+        <p:nvSpPr>
+          <p:cNvPr id="19" name="Text 17"/>
+          <p:cNvSpPr/>
+          <p:nvPr/>
+        </p:nvSpPr>
+        <p:spPr>
+          <a:xfrm>
+            <a:off x="7498080" y="3781044"/>
+            <a:ext cx="1783080" cy="658368"/>
+          </a:xfrm>
+          <a:prstGeom prst="rect">
+            <a:avLst/>
+          </a:prstGeom>
+          <a:noFill/>
+          <a:ln/>
+        </p:spPr>
+        <p:txBody>
+          <a:bodyPr wrap="square" lIns="0" tIns="0" rIns="0" bIns="0" rtlCol="0" anchor="ctr"/>
+          <a:lstStyle/>
+          <a:p>
+            <a:pPr algn="ctr" indent="0" marL="0">
+              <a:buNone/>
+            </a:pPr>
+            <a:r>
+              <a:rPr lang="en-US" sz="1100" b="1" dirty="0">
+                <a:solidFill>
+                  <a:srgbClr val="F5F9FA"/>
+                </a:solidFill>
+                <a:latin typeface="Calibri" pitchFamily="34" charset="0"/>
+                <a:ea typeface="Calibri" pitchFamily="34" charset="-122"/>
+                <a:cs typeface="Calibri" pitchFamily="34" charset="-120"/>
+              </a:rPr>
+              <a:t>Correlation</a:t>
+            </a:r>
+            <a:endParaRPr lang="en-US" sz="1100" dirty="0"/>
+          </a:p>
+        </p:txBody>
+      </p:sp>
+      <p:sp>
+        <p:nvSpPr>
+          <p:cNvPr id="20" name="Shape 18"/>
+          <p:cNvSpPr/>
+          <p:nvPr/>
+        </p:nvSpPr>
+        <p:spPr>
+          <a:xfrm>
+            <a:off x="7406640" y="4594860"/>
+            <a:ext cx="1965960" cy="658368"/>
+          </a:xfrm>
+          <a:prstGeom prst="roundRect">
+            <a:avLst>
+              <a:gd name="adj" fmla="val 9722"/>
+            </a:avLst>
+          </a:prstGeom>
+          <a:solidFill>
+            <a:srgbClr val="14181C"/>
+          </a:solidFill>
+          <a:ln/>
+          <a:effectLst>
+            <a:outerShdw sx="100000" sy="100000" kx="0" ky="0" algn="bl" rotWithShape="0" blurRad="76200" dist="25400" dir="5400000">
+              <a:srgbClr val="000000">
+                <a:alpha val="22000"/>
+              </a:srgbClr>
+            </a:outerShdw>
+          </a:effectLst>
+        </p:spPr>
+      </p:sp>
+      <p:sp>
+        <p:nvSpPr>
+          <p:cNvPr id="21" name="Text 19"/>
+          <p:cNvSpPr/>
+          <p:nvPr/>
+        </p:nvSpPr>
+        <p:spPr>
+          <a:xfrm>
+            <a:off x="7498080" y="4594860"/>
+            <a:ext cx="1783080" cy="658368"/>
+          </a:xfrm>
+          <a:prstGeom prst="rect">
+            <a:avLst/>
+          </a:prstGeom>
+          <a:noFill/>
+          <a:ln/>
+        </p:spPr>
+        <p:txBody>
+          <a:bodyPr wrap="square" lIns="0" tIns="0" rIns="0" bIns="0" rtlCol="0" anchor="ctr"/>
+          <a:lstStyle/>
+          <a:p>
+            <a:pPr algn="ctr" indent="0" marL="0">
+              <a:buNone/>
+            </a:pPr>
+            <a:r>
+              <a:rPr lang="en-US" sz="1100" b="1" dirty="0">
+                <a:solidFill>
+                  <a:srgbClr val="F5F9FA"/>
+                </a:solidFill>
+                <a:latin typeface="Calibri" pitchFamily="34" charset="0"/>
+                <a:ea typeface="Calibri" pitchFamily="34" charset="-122"/>
+                <a:cs typeface="Calibri" pitchFamily="34" charset="-120"/>
+              </a:rPr>
+              <a:t>ARIMA Forecast</a:t>
+            </a:r>
+            <a:endParaRPr lang="en-US" sz="1100" dirty="0"/>
+          </a:p>
+        </p:txBody>
+      </p:sp>
+      <p:sp>
+        <p:nvSpPr>
+          <p:cNvPr id="22" name="Shape 20"/>
+          <p:cNvSpPr/>
+          <p:nvPr/>
+        </p:nvSpPr>
+        <p:spPr>
+          <a:xfrm>
+            <a:off x="9692640" y="2560320"/>
+            <a:ext cx="1965960" cy="2286000"/>
+          </a:xfrm>
+          <a:prstGeom prst="roundRect">
+            <a:avLst>
+              <a:gd name="adj" fmla="val 3721"/>
+            </a:avLst>
+          </a:prstGeom>
+          <a:solidFill>
+            <a:srgbClr val="14181C"/>
+          </a:solidFill>
+          <a:ln w="15875">
+            <a:solidFill>
+              <a:srgbClr val="00BCD4"/>
+            </a:solidFill>
+            <a:prstDash val="solid"/>
+          </a:ln>
+          <a:effectLst>
+            <a:outerShdw sx="100000" sy="100000" kx="0" ky="0" algn="bl" rotWithShape="0" blurRad="101600" dist="38100" dir="5400000">
+              <a:srgbClr val="000000">
+                <a:alpha val="28000"/>
+              </a:srgbClr>
+            </a:outerShdw>
+          </a:effectLst>
+        </p:spPr>
+      </p:sp>
+      <p:sp>
+        <p:nvSpPr>
+          <p:cNvPr id="23" name="Text 21"/>
+          <p:cNvSpPr/>
+          <p:nvPr/>
+        </p:nvSpPr>
+        <p:spPr>
+          <a:xfrm>
+            <a:off x="9829800" y="2724912"/>
+            <a:ext cx="1691640" cy="411480"/>
+          </a:xfrm>
+          <a:prstGeom prst="rect">
+            <a:avLst/>
+          </a:prstGeom>
+          <a:noFill/>
+          <a:ln/>
+        </p:spPr>
+        <p:txBody>
+          <a:bodyPr wrap="square" lIns="0" tIns="0" rIns="0" bIns="0" rtlCol="0" anchor="ctr"/>
+          <a:lstStyle/>
+          <a:p>
+            <a:pPr algn="ctr" indent="0" marL="0">
+              <a:buNone/>
+            </a:pPr>
+            <a:r>
+              <a:rPr lang="en-US" sz="1250" b="1" dirty="0">
+                <a:solidFill>
+                  <a:srgbClr val="F5F9FA"/>
+                </a:solidFill>
+                <a:latin typeface="Calibri" pitchFamily="34" charset="0"/>
+                <a:ea typeface="Calibri" pitchFamily="34" charset="-122"/>
+                <a:cs typeface="Calibri" pitchFamily="34" charset="-120"/>
+              </a:rPr>
+              <a:t>Dashboard</a:t>
+            </a:r>
+            <a:endParaRPr lang="en-US" sz="1250" dirty="0"/>
+          </a:p>
+        </p:txBody>
+      </p:sp>
+      <p:sp>
+        <p:nvSpPr>
+          <p:cNvPr id="24" name="Text 22"/>
+          <p:cNvSpPr/>
+          <p:nvPr/>
+        </p:nvSpPr>
+        <p:spPr>
+          <a:xfrm>
+            <a:off x="9829800" y="3127248"/>
+            <a:ext cx="1691640" cy="1572768"/>
+          </a:xfrm>
+          <a:prstGeom prst="rect">
+            <a:avLst/>
+          </a:prstGeom>
+          <a:noFill/>
+          <a:ln/>
+        </p:spPr>
+        <p:txBody>
+          <a:bodyPr wrap="square" lIns="0" tIns="0" rIns="0" bIns="0" rtlCol="0" anchor="ctr"/>
+          <a:lstStyle/>
+          <a:p>
+            <a:pPr algn="ctr" indent="0" marL="0">
+              <a:lnSpc>
+                <a:spcPct val="122000"/>
+              </a:lnSpc>
+              <a:buNone/>
+            </a:pPr>
+            <a:r>
+              <a:rPr lang="en-US" sz="960" dirty="0">
+                <a:solidFill>
+                  <a:srgbClr val="9FB0B8"/>
+                </a:solidFill>
+                <a:latin typeface="Calibri" pitchFamily="34" charset="0"/>
+                <a:ea typeface="Calibri" pitchFamily="34" charset="-122"/>
+                <a:cs typeface="Calibri" pitchFamily="34" charset="-120"/>
+              </a:rPr>
+              <a:t>six Streamlit tabs</a:t>
+            </a:r>
+            <a:endParaRPr lang="en-US" sz="960" dirty="0"/>
+          </a:p>
+          <a:p>
+            <a:pPr algn="ctr" indent="0" marL="0">
+              <a:lnSpc>
+                <a:spcPct val="122000"/>
+              </a:lnSpc>
+              <a:buNone/>
+            </a:pPr>
+            <a:r>
+              <a:rPr lang="en-US" sz="960" dirty="0">
+                <a:solidFill>
+                  <a:srgbClr val="9FB0B8"/>
+                </a:solidFill>
+                <a:latin typeface="Calibri" pitchFamily="34" charset="0"/>
+                <a:ea typeface="Calibri" pitchFamily="34" charset="-122"/>
+                <a:cs typeface="Calibri" pitchFamily="34" charset="-120"/>
+              </a:rPr>
+              <a:t>Plotly charts</a:t>
+            </a:r>
+            <a:endParaRPr lang="en-US" sz="960" dirty="0"/>
+          </a:p>
+          <a:p>
+            <a:pPr algn="ctr" indent="0" marL="0">
+              <a:lnSpc>
+                <a:spcPct val="122000"/>
+              </a:lnSpc>
+              <a:buNone/>
+            </a:pPr>
+            <a:r>
+              <a:rPr lang="en-US" sz="960" dirty="0">
+                <a:solidFill>
+                  <a:srgbClr val="9FB0B8"/>
+                </a:solidFill>
+                <a:latin typeface="Calibri" pitchFamily="34" charset="0"/>
+                <a:ea typeface="Calibri" pitchFamily="34" charset="-122"/>
+                <a:cs typeface="Calibri" pitchFamily="34" charset="-120"/>
+              </a:rPr>
+              <a:t>live / sample</a:t>
+            </a:r>
+            <a:endParaRPr lang="en-US" sz="960" dirty="0"/>
+          </a:p>
+          <a:p>
+            <a:pPr algn="ctr" indent="0" marL="0">
+              <a:lnSpc>
+                <a:spcPct val="122000"/>
+              </a:lnSpc>
+              <a:buNone/>
+            </a:pPr>
+            <a:r>
+              <a:rPr lang="en-US" sz="960" dirty="0">
+                <a:solidFill>
+                  <a:srgbClr val="9FB0B8"/>
+                </a:solidFill>
+                <a:latin typeface="Calibri" pitchFamily="34" charset="0"/>
+                <a:ea typeface="Calibri" pitchFamily="34" charset="-122"/>
+                <a:cs typeface="Calibri" pitchFamily="34" charset="-120"/>
+              </a:rPr>
+              <a:t>badges per feed</a:t>
+            </a:r>
+            <a:endParaRPr lang="en-US" sz="960" dirty="0"/>
+          </a:p>
+        </p:txBody>
+      </p:sp>
+      <p:sp>
+        <p:nvSpPr>
+          <p:cNvPr id="25" name="Shape 23"/>
+          <p:cNvSpPr/>
+          <p:nvPr/>
+        </p:nvSpPr>
+        <p:spPr>
+          <a:xfrm>
+            <a:off x="2551176" y="3703320"/>
+            <a:ext cx="246888" cy="0"/>
+          </a:xfrm>
+          <a:prstGeom prst="line">
+            <a:avLst/>
+          </a:prstGeom>
+          <a:noFill/>
+          <a:ln w="22225">
+            <a:solidFill>
+              <a:srgbClr val="00BCD4"/>
+            </a:solidFill>
+            <a:prstDash val="solid"/>
+            <a:tailEnd type="triangle"/>
+          </a:ln>
+        </p:spPr>
+      </p:sp>
+      <p:sp>
+        <p:nvSpPr>
+          <p:cNvPr id="26" name="Shape 24"/>
+          <p:cNvSpPr/>
+          <p:nvPr/>
+        </p:nvSpPr>
+        <p:spPr>
+          <a:xfrm>
+            <a:off x="4837176" y="3703320"/>
+            <a:ext cx="246888" cy="0"/>
+          </a:xfrm>
+          <a:prstGeom prst="line">
+            <a:avLst/>
+          </a:prstGeom>
+          <a:noFill/>
+          <a:ln w="22225">
+            <a:solidFill>
+              <a:srgbClr val="00BCD4"/>
+            </a:solidFill>
+            <a:prstDash val="solid"/>
+            <a:tailEnd type="triangle"/>
+          </a:ln>
+        </p:spPr>
+      </p:sp>
+      <p:sp>
+        <p:nvSpPr>
+          <p:cNvPr id="27" name="Shape 25"/>
+          <p:cNvSpPr/>
+          <p:nvPr/>
+        </p:nvSpPr>
+        <p:spPr>
+          <a:xfrm>
+            <a:off x="7123176" y="3703320"/>
+            <a:ext cx="246888" cy="0"/>
+          </a:xfrm>
+          <a:prstGeom prst="line">
+            <a:avLst/>
+          </a:prstGeom>
+          <a:noFill/>
+          <a:ln w="22225">
+            <a:solidFill>
+              <a:srgbClr val="00BCD4"/>
+            </a:solidFill>
+            <a:prstDash val="solid"/>
+            <a:tailEnd type="triangle"/>
+          </a:ln>
+        </p:spPr>
+      </p:sp>
+      <p:sp>
+        <p:nvSpPr>
+          <p:cNvPr id="28" name="Shape 26"/>
+          <p:cNvSpPr/>
+          <p:nvPr/>
+        </p:nvSpPr>
+        <p:spPr>
+          <a:xfrm>
+            <a:off x="9409176" y="3703320"/>
+            <a:ext cx="246888" cy="0"/>
+          </a:xfrm>
+          <a:prstGeom prst="line">
+            <a:avLst/>
+          </a:prstGeom>
+          <a:noFill/>
+          <a:ln w="22225">
+            <a:solidFill>
+              <a:srgbClr val="00BCD4"/>
+            </a:solidFill>
+            <a:prstDash val="solid"/>
+            <a:tailEnd type="triangle"/>
+          </a:ln>
+        </p:spPr>
+      </p:sp>
+      <p:sp>
+        <p:nvSpPr>
+          <p:cNvPr id="29" name="Shape 27"/>
+          <p:cNvSpPr/>
+          <p:nvPr/>
+        </p:nvSpPr>
+        <p:spPr>
+          <a:xfrm>
+            <a:off x="548640" y="5349240"/>
+            <a:ext cx="11091672" cy="777240"/>
+          </a:xfrm>
+          <a:prstGeom prst="roundRect">
+            <a:avLst>
+              <a:gd name="adj" fmla="val 9412"/>
+            </a:avLst>
+          </a:prstGeom>
+          <a:solidFill>
+            <a:srgbClr val="F1F5F6"/>
+          </a:solidFill>
+          <a:ln/>
+        </p:spPr>
+      </p:sp>
+      <p:sp>
+        <p:nvSpPr>
+          <p:cNvPr id="30" name="Text 28"/>
+          <p:cNvSpPr/>
+          <p:nvPr/>
+        </p:nvSpPr>
+        <p:spPr>
+          <a:xfrm>
+            <a:off x="822960" y="5349240"/>
+            <a:ext cx="10515600" cy="777240"/>
+          </a:xfrm>
+          <a:prstGeom prst="rect">
+            <a:avLst/>
+          </a:prstGeom>
+          <a:noFill/>
+          <a:ln/>
+        </p:spPr>
+        <p:txBody>
+          <a:bodyPr wrap="square" lIns="0" tIns="0" rIns="0" bIns="0" rtlCol="0" anchor="ctr"/>
+          <a:lstStyle/>
+          <a:p>
+            <a:pPr indent="0" marL="0">
+              <a:buNone/>
+            </a:pPr>
+            <a:r>
+              <a:rPr lang="en-US" sz="1250" i="1" dirty="0">
+                <a:solidFill>
+                  <a:srgbClr val="16202A"/>
+                </a:solidFill>
+                <a:latin typeface="Calibri" pitchFamily="34" charset="0"/>
+                <a:ea typeface="Calibri" pitchFamily="34" charset="-122"/>
+                <a:cs typeface="Calibri" pitchFamily="34" charset="-120"/>
+              </a:rPr>
+              <a:t>Each analysis reads the same bundle and depends on nothing else — a fifth one could be added without touching a single data loader.</a:t>
+            </a:r>
+            <a:endParaRPr lang="en-US" sz="1250" dirty="0"/>
+          </a:p>
+        </p:txBody>
+      </p:sp>
+      <p:sp>
+        <p:nvSpPr>
+          <p:cNvPr id="31" name="Text 29"/>
           <p:cNvSpPr/>
           <p:nvPr/>
         </p:nvSpPr>
@@ -15286,7 +16538,7 @@
       </p:sp>
       <p:sp>
         <p:nvSpPr>
-          <p:cNvPr id="7" name="Text 4"/>
+          <p:cNvPr id="32" name="Text 30"/>
           <p:cNvSpPr/>
           <p:nvPr/>
         </p:nvSpPr>
